--- a/assets/modelo-acessivel.pptx
+++ b/assets/modelo-acessivel.pptx
@@ -133,8 +133,8 @@
         </p:nvSpPr>
         <p:spPr>
           <a:xfrm>
-            <a:off x="504000" y="2232000"/>
-            <a:ext cx="7396800" cy="1656000"/>
+            <a:off x="504000" y="1512000"/>
+            <a:ext cx="7396800" cy="1224000"/>
           </a:xfrm>
         </p:spPr>
         <p:txBody>
@@ -161,8 +161,8 @@
         </p:nvSpPr>
         <p:spPr>
           <a:xfrm>
-            <a:off x="504000" y="4032000"/>
-            <a:ext cx="7396800" cy="1584000"/>
+            <a:off x="504000" y="2952000"/>
+            <a:ext cx="7396800" cy="3096000"/>
           </a:xfrm>
         </p:spPr>
         <p:txBody>
@@ -332,6 +332,62 @@
             <a:endParaRPr lang="en-US"/>
           </a:p>
         </p:txBody>
+      </p:sp>
+      <p:sp>
+        <p:nvSpPr>
+          <p:cNvPr id="7" name="Filete de acento">
+            <a:extLst>
+              <a:ext uri="{C183D7F6-B498-43B3-948B-1728B52AA6E4}">
+                <ns0:decorative xmlns:ns0="http://schemas.microsoft.com/office/drawing/2017/decorative" val="1"/>
+              </a:ext>
+            </a:extLst>
+          </p:cNvPr>
+          <p:cNvSpPr/>
+          <p:nvPr/>
+        </p:nvSpPr>
+        <p:spPr>
+          <a:xfrm>
+            <a:off x="504000" y="1152000"/>
+            <a:ext cx="3608400" cy="108000"/>
+          </a:xfrm>
+          <a:prstGeom prst="rect">
+            <a:avLst/>
+          </a:prstGeom>
+          <a:solidFill>
+            <a:schemeClr val="accent1"/>
+          </a:solidFill>
+          <a:ln>
+            <a:noFill/>
+          </a:ln>
+        </p:spPr>
+      </p:sp>
+      <p:sp>
+        <p:nvSpPr>
+          <p:cNvPr id="8" name="Faixa estética do rodapé">
+            <a:extLst>
+              <a:ext uri="{C183D7F6-B498-43B3-948B-1728B52AA6E4}">
+                <ns0:decorative xmlns:ns0="http://schemas.microsoft.com/office/drawing/2017/decorative" val="1"/>
+              </a:ext>
+            </a:extLst>
+          </p:cNvPr>
+          <p:cNvSpPr/>
+          <p:nvPr/>
+        </p:nvSpPr>
+        <p:spPr>
+          <a:xfrm>
+            <a:off x="0" y="6660000"/>
+            <a:ext cx="12193200" cy="198000"/>
+          </a:xfrm>
+          <a:prstGeom prst="rect">
+            <a:avLst/>
+          </a:prstGeom>
+          <a:solidFill>
+            <a:schemeClr val="accent1"/>
+          </a:solidFill>
+          <a:ln>
+            <a:noFill/>
+          </a:ln>
+        </p:spPr>
       </p:sp>
     </p:spTree>
     <p:extLst>
@@ -515,7 +571,63 @@
       </p:sp>
       <p:sp>
         <p:nvSpPr>
-          <p:cNvPr id="7" name="Cartão 2"/>
+          <p:cNvPr id="7" name="Filete de acento">
+            <a:extLst>
+              <a:ext uri="{C183D7F6-B498-43B3-948B-1728B52AA6E4}">
+                <ns0:decorative xmlns:ns0="http://schemas.microsoft.com/office/drawing/2017/decorative" val="1"/>
+              </a:ext>
+            </a:extLst>
+          </p:cNvPr>
+          <p:cNvSpPr/>
+          <p:nvPr/>
+        </p:nvSpPr>
+        <p:spPr>
+          <a:xfrm>
+            <a:off x="504000" y="1368000"/>
+            <a:ext cx="1714200" cy="57600"/>
+          </a:xfrm>
+          <a:prstGeom prst="rect">
+            <a:avLst/>
+          </a:prstGeom>
+          <a:solidFill>
+            <a:schemeClr val="accent1"/>
+          </a:solidFill>
+          <a:ln>
+            <a:noFill/>
+          </a:ln>
+        </p:spPr>
+      </p:sp>
+      <p:sp>
+        <p:nvSpPr>
+          <p:cNvPr id="8" name="Faixa estética do rodapé">
+            <a:extLst>
+              <a:ext uri="{C183D7F6-B498-43B3-948B-1728B52AA6E4}">
+                <ns0:decorative xmlns:ns0="http://schemas.microsoft.com/office/drawing/2017/decorative" val="1"/>
+              </a:ext>
+            </a:extLst>
+          </p:cNvPr>
+          <p:cNvSpPr/>
+          <p:nvPr/>
+        </p:nvSpPr>
+        <p:spPr>
+          <a:xfrm>
+            <a:off x="0" y="6660000"/>
+            <a:ext cx="12193200" cy="198000"/>
+          </a:xfrm>
+          <a:prstGeom prst="rect">
+            <a:avLst/>
+          </a:prstGeom>
+          <a:solidFill>
+            <a:schemeClr val="accent1"/>
+          </a:solidFill>
+          <a:ln>
+            <a:noFill/>
+          </a:ln>
+        </p:spPr>
+      </p:sp>
+      <p:sp>
+        <p:nvSpPr>
+          <p:cNvPr id="9" name="Cartão 2"/>
           <p:cNvSpPr>
             <a:spLocks noGrp="1"/>
           </p:cNvSpPr>
@@ -572,7 +684,7 @@
       </p:sp>
       <p:sp>
         <p:nvSpPr>
-          <p:cNvPr id="8" name="Cartão 3"/>
+          <p:cNvPr id="10" name="Cartão 3"/>
           <p:cNvSpPr>
             <a:spLocks noGrp="1"/>
           </p:cNvSpPr>
@@ -629,7 +741,7 @@
       </p:sp>
       <p:sp>
         <p:nvSpPr>
-          <p:cNvPr id="9" name="Cartão 4"/>
+          <p:cNvPr id="11" name="Cartão 4"/>
           <p:cNvSpPr>
             <a:spLocks noGrp="1"/>
           </p:cNvSpPr>
@@ -864,6 +976,62 @@
           </a:p>
         </p:txBody>
       </p:sp>
+      <p:sp>
+        <p:nvSpPr>
+          <p:cNvPr id="7" name="Filete de acento">
+            <a:extLst>
+              <a:ext uri="{C183D7F6-B498-43B3-948B-1728B52AA6E4}">
+                <ns0:decorative xmlns:ns0="http://schemas.microsoft.com/office/drawing/2017/decorative" val="1"/>
+              </a:ext>
+            </a:extLst>
+          </p:cNvPr>
+          <p:cNvSpPr/>
+          <p:nvPr/>
+        </p:nvSpPr>
+        <p:spPr>
+          <a:xfrm>
+            <a:off x="504000" y="1656000"/>
+            <a:ext cx="1714200" cy="108000"/>
+          </a:xfrm>
+          <a:prstGeom prst="rect">
+            <a:avLst/>
+          </a:prstGeom>
+          <a:solidFill>
+            <a:schemeClr val="accent1"/>
+          </a:solidFill>
+          <a:ln>
+            <a:noFill/>
+          </a:ln>
+        </p:spPr>
+      </p:sp>
+      <p:sp>
+        <p:nvSpPr>
+          <p:cNvPr id="8" name="Faixa estética do rodapé">
+            <a:extLst>
+              <a:ext uri="{C183D7F6-B498-43B3-948B-1728B52AA6E4}">
+                <ns0:decorative xmlns:ns0="http://schemas.microsoft.com/office/drawing/2017/decorative" val="1"/>
+              </a:ext>
+            </a:extLst>
+          </p:cNvPr>
+          <p:cNvSpPr/>
+          <p:nvPr/>
+        </p:nvSpPr>
+        <p:spPr>
+          <a:xfrm>
+            <a:off x="0" y="6660000"/>
+            <a:ext cx="12193200" cy="198000"/>
+          </a:xfrm>
+          <a:prstGeom prst="rect">
+            <a:avLst/>
+          </a:prstGeom>
+          <a:solidFill>
+            <a:schemeClr val="accent1"/>
+          </a:solidFill>
+          <a:ln>
+            <a:noFill/>
+          </a:ln>
+        </p:spPr>
+      </p:sp>
     </p:spTree>
     <p:extLst>
       <p:ext uri="{BB962C8B-B14F-4D97-AF65-F5344CB8AC3E}">
@@ -1044,6 +1212,62 @@
           </a:p>
         </p:txBody>
       </p:sp>
+      <p:sp>
+        <p:nvSpPr>
+          <p:cNvPr id="7" name="Filete de acento">
+            <a:extLst>
+              <a:ext uri="{C183D7F6-B498-43B3-948B-1728B52AA6E4}">
+                <ns0:decorative xmlns:ns0="http://schemas.microsoft.com/office/drawing/2017/decorative" val="1"/>
+              </a:ext>
+            </a:extLst>
+          </p:cNvPr>
+          <p:cNvSpPr/>
+          <p:nvPr/>
+        </p:nvSpPr>
+        <p:spPr>
+          <a:xfrm>
+            <a:off x="504000" y="1368000"/>
+            <a:ext cx="1714200" cy="57600"/>
+          </a:xfrm>
+          <a:prstGeom prst="rect">
+            <a:avLst/>
+          </a:prstGeom>
+          <a:solidFill>
+            <a:schemeClr val="accent1"/>
+          </a:solidFill>
+          <a:ln>
+            <a:noFill/>
+          </a:ln>
+        </p:spPr>
+      </p:sp>
+      <p:sp>
+        <p:nvSpPr>
+          <p:cNvPr id="8" name="Faixa estética do rodapé">
+            <a:extLst>
+              <a:ext uri="{C183D7F6-B498-43B3-948B-1728B52AA6E4}">
+                <ns0:decorative xmlns:ns0="http://schemas.microsoft.com/office/drawing/2017/decorative" val="1"/>
+              </a:ext>
+            </a:extLst>
+          </p:cNvPr>
+          <p:cNvSpPr/>
+          <p:nvPr/>
+        </p:nvSpPr>
+        <p:spPr>
+          <a:xfrm>
+            <a:off x="0" y="6660000"/>
+            <a:ext cx="12193200" cy="198000"/>
+          </a:xfrm>
+          <a:prstGeom prst="rect">
+            <a:avLst/>
+          </a:prstGeom>
+          <a:solidFill>
+            <a:schemeClr val="accent1"/>
+          </a:solidFill>
+          <a:ln>
+            <a:noFill/>
+          </a:ln>
+        </p:spPr>
+      </p:sp>
     </p:spTree>
     <p:extLst>
       <p:ext uri="{BB962C8B-B14F-4D97-AF65-F5344CB8AC3E}">
@@ -1290,6 +1514,62 @@
           </a:p>
         </p:txBody>
       </p:sp>
+      <p:sp>
+        <p:nvSpPr>
+          <p:cNvPr id="7" name="Filete de acento">
+            <a:extLst>
+              <a:ext uri="{C183D7F6-B498-43B3-948B-1728B52AA6E4}">
+                <ns0:decorative xmlns:ns0="http://schemas.microsoft.com/office/drawing/2017/decorative" val="1"/>
+              </a:ext>
+            </a:extLst>
+          </p:cNvPr>
+          <p:cNvSpPr/>
+          <p:nvPr/>
+        </p:nvSpPr>
+        <p:spPr>
+          <a:xfrm>
+            <a:off x="504000" y="2016000"/>
+            <a:ext cx="2661300" cy="108000"/>
+          </a:xfrm>
+          <a:prstGeom prst="rect">
+            <a:avLst/>
+          </a:prstGeom>
+          <a:solidFill>
+            <a:schemeClr val="accent1"/>
+          </a:solidFill>
+          <a:ln>
+            <a:noFill/>
+          </a:ln>
+        </p:spPr>
+      </p:sp>
+      <p:sp>
+        <p:nvSpPr>
+          <p:cNvPr id="8" name="Faixa estética do rodapé">
+            <a:extLst>
+              <a:ext uri="{C183D7F6-B498-43B3-948B-1728B52AA6E4}">
+                <ns0:decorative xmlns:ns0="http://schemas.microsoft.com/office/drawing/2017/decorative" val="1"/>
+              </a:ext>
+            </a:extLst>
+          </p:cNvPr>
+          <p:cNvSpPr/>
+          <p:nvPr/>
+        </p:nvSpPr>
+        <p:spPr>
+          <a:xfrm>
+            <a:off x="0" y="6660000"/>
+            <a:ext cx="12193200" cy="198000"/>
+          </a:xfrm>
+          <a:prstGeom prst="rect">
+            <a:avLst/>
+          </a:prstGeom>
+          <a:solidFill>
+            <a:schemeClr val="accent1"/>
+          </a:solidFill>
+          <a:ln>
+            <a:noFill/>
+          </a:ln>
+        </p:spPr>
+      </p:sp>
     </p:spTree>
     <p:extLst>
       <p:ext uri="{BB962C8B-B14F-4D97-AF65-F5344CB8AC3E}">
@@ -1583,6 +1863,62 @@
           </a:p>
         </p:txBody>
       </p:sp>
+      <p:sp>
+        <p:nvSpPr>
+          <p:cNvPr id="8" name="Filete de acento">
+            <a:extLst>
+              <a:ext uri="{C183D7F6-B498-43B3-948B-1728B52AA6E4}">
+                <ns0:decorative xmlns:ns0="http://schemas.microsoft.com/office/drawing/2017/decorative" val="1"/>
+              </a:ext>
+            </a:extLst>
+          </p:cNvPr>
+          <p:cNvSpPr/>
+          <p:nvPr/>
+        </p:nvSpPr>
+        <p:spPr>
+          <a:xfrm>
+            <a:off x="504000" y="1368000"/>
+            <a:ext cx="1714200" cy="57600"/>
+          </a:xfrm>
+          <a:prstGeom prst="rect">
+            <a:avLst/>
+          </a:prstGeom>
+          <a:solidFill>
+            <a:schemeClr val="accent1"/>
+          </a:solidFill>
+          <a:ln>
+            <a:noFill/>
+          </a:ln>
+        </p:spPr>
+      </p:sp>
+      <p:sp>
+        <p:nvSpPr>
+          <p:cNvPr id="9" name="Faixa estética do rodapé">
+            <a:extLst>
+              <a:ext uri="{C183D7F6-B498-43B3-948B-1728B52AA6E4}">
+                <ns0:decorative xmlns:ns0="http://schemas.microsoft.com/office/drawing/2017/decorative" val="1"/>
+              </a:ext>
+            </a:extLst>
+          </p:cNvPr>
+          <p:cNvSpPr/>
+          <p:nvPr/>
+        </p:nvSpPr>
+        <p:spPr>
+          <a:xfrm>
+            <a:off x="0" y="6660000"/>
+            <a:ext cx="12193200" cy="198000"/>
+          </a:xfrm>
+          <a:prstGeom prst="rect">
+            <a:avLst/>
+          </a:prstGeom>
+          <a:solidFill>
+            <a:schemeClr val="accent1"/>
+          </a:solidFill>
+          <a:ln>
+            <a:noFill/>
+          </a:ln>
+        </p:spPr>
+      </p:sp>
     </p:spTree>
     <p:extLst>
       <p:ext uri="{BB962C8B-B14F-4D97-AF65-F5344CB8AC3E}">
@@ -2010,6 +2346,62 @@
           </a:p>
         </p:txBody>
       </p:sp>
+      <p:sp>
+        <p:nvSpPr>
+          <p:cNvPr id="10" name="Filete de acento">
+            <a:extLst>
+              <a:ext uri="{C183D7F6-B498-43B3-948B-1728B52AA6E4}">
+                <ns0:decorative xmlns:ns0="http://schemas.microsoft.com/office/drawing/2017/decorative" val="1"/>
+              </a:ext>
+            </a:extLst>
+          </p:cNvPr>
+          <p:cNvSpPr/>
+          <p:nvPr/>
+        </p:nvSpPr>
+        <p:spPr>
+          <a:xfrm>
+            <a:off x="504000" y="1368000"/>
+            <a:ext cx="1714200" cy="57600"/>
+          </a:xfrm>
+          <a:prstGeom prst="rect">
+            <a:avLst/>
+          </a:prstGeom>
+          <a:solidFill>
+            <a:schemeClr val="accent1"/>
+          </a:solidFill>
+          <a:ln>
+            <a:noFill/>
+          </a:ln>
+        </p:spPr>
+      </p:sp>
+      <p:sp>
+        <p:nvSpPr>
+          <p:cNvPr id="11" name="Faixa estética do rodapé">
+            <a:extLst>
+              <a:ext uri="{C183D7F6-B498-43B3-948B-1728B52AA6E4}">
+                <ns0:decorative xmlns:ns0="http://schemas.microsoft.com/office/drawing/2017/decorative" val="1"/>
+              </a:ext>
+            </a:extLst>
+          </p:cNvPr>
+          <p:cNvSpPr/>
+          <p:nvPr/>
+        </p:nvSpPr>
+        <p:spPr>
+          <a:xfrm>
+            <a:off x="0" y="6660000"/>
+            <a:ext cx="12193200" cy="198000"/>
+          </a:xfrm>
+          <a:prstGeom prst="rect">
+            <a:avLst/>
+          </a:prstGeom>
+          <a:solidFill>
+            <a:schemeClr val="accent1"/>
+          </a:solidFill>
+          <a:ln>
+            <a:noFill/>
+          </a:ln>
+        </p:spPr>
+      </p:sp>
     </p:spTree>
     <p:extLst>
       <p:ext uri="{BB962C8B-B14F-4D97-AF65-F5344CB8AC3E}">
@@ -2133,6 +2525,62 @@
           </a:p>
         </p:txBody>
       </p:sp>
+      <p:sp>
+        <p:nvSpPr>
+          <p:cNvPr id="6" name="Filete de acento">
+            <a:extLst>
+              <a:ext uri="{C183D7F6-B498-43B3-948B-1728B52AA6E4}">
+                <ns0:decorative xmlns:ns0="http://schemas.microsoft.com/office/drawing/2017/decorative" val="1"/>
+              </a:ext>
+            </a:extLst>
+          </p:cNvPr>
+          <p:cNvSpPr/>
+          <p:nvPr/>
+        </p:nvSpPr>
+        <p:spPr>
+          <a:xfrm>
+            <a:off x="504000" y="1368000"/>
+            <a:ext cx="1714200" cy="57600"/>
+          </a:xfrm>
+          <a:prstGeom prst="rect">
+            <a:avLst/>
+          </a:prstGeom>
+          <a:solidFill>
+            <a:schemeClr val="accent1"/>
+          </a:solidFill>
+          <a:ln>
+            <a:noFill/>
+          </a:ln>
+        </p:spPr>
+      </p:sp>
+      <p:sp>
+        <p:nvSpPr>
+          <p:cNvPr id="7" name="Faixa estética do rodapé">
+            <a:extLst>
+              <a:ext uri="{C183D7F6-B498-43B3-948B-1728B52AA6E4}">
+                <ns0:decorative xmlns:ns0="http://schemas.microsoft.com/office/drawing/2017/decorative" val="1"/>
+              </a:ext>
+            </a:extLst>
+          </p:cNvPr>
+          <p:cNvSpPr/>
+          <p:nvPr/>
+        </p:nvSpPr>
+        <p:spPr>
+          <a:xfrm>
+            <a:off x="0" y="6660000"/>
+            <a:ext cx="12193200" cy="198000"/>
+          </a:xfrm>
+          <a:prstGeom prst="rect">
+            <a:avLst/>
+          </a:prstGeom>
+          <a:solidFill>
+            <a:schemeClr val="accent1"/>
+          </a:solidFill>
+          <a:ln>
+            <a:noFill/>
+          </a:ln>
+        </p:spPr>
+      </p:sp>
     </p:spTree>
     <p:extLst>
       <p:ext uri="{BB962C8B-B14F-4D97-AF65-F5344CB8AC3E}">
@@ -2505,6 +2953,62 @@
           </a:p>
         </p:txBody>
       </p:sp>
+      <p:sp>
+        <p:nvSpPr>
+          <p:cNvPr id="8" name="Filete de acento">
+            <a:extLst>
+              <a:ext uri="{C183D7F6-B498-43B3-948B-1728B52AA6E4}">
+                <ns0:decorative xmlns:ns0="http://schemas.microsoft.com/office/drawing/2017/decorative" val="1"/>
+              </a:ext>
+            </a:extLst>
+          </p:cNvPr>
+          <p:cNvSpPr/>
+          <p:nvPr/>
+        </p:nvSpPr>
+        <p:spPr>
+          <a:xfrm>
+            <a:off x="504000" y="1368000"/>
+            <a:ext cx="1714200" cy="57600"/>
+          </a:xfrm>
+          <a:prstGeom prst="rect">
+            <a:avLst/>
+          </a:prstGeom>
+          <a:solidFill>
+            <a:schemeClr val="accent1"/>
+          </a:solidFill>
+          <a:ln>
+            <a:noFill/>
+          </a:ln>
+        </p:spPr>
+      </p:sp>
+      <p:sp>
+        <p:nvSpPr>
+          <p:cNvPr id="9" name="Faixa estética do rodapé">
+            <a:extLst>
+              <a:ext uri="{C183D7F6-B498-43B3-948B-1728B52AA6E4}">
+                <ns0:decorative xmlns:ns0="http://schemas.microsoft.com/office/drawing/2017/decorative" val="1"/>
+              </a:ext>
+            </a:extLst>
+          </p:cNvPr>
+          <p:cNvSpPr/>
+          <p:nvPr/>
+        </p:nvSpPr>
+        <p:spPr>
+          <a:xfrm>
+            <a:off x="0" y="6660000"/>
+            <a:ext cx="12193200" cy="198000"/>
+          </a:xfrm>
+          <a:prstGeom prst="rect">
+            <a:avLst/>
+          </a:prstGeom>
+          <a:solidFill>
+            <a:schemeClr val="accent1"/>
+          </a:solidFill>
+          <a:ln>
+            <a:noFill/>
+          </a:ln>
+        </p:spPr>
+      </p:sp>
     </p:spTree>
     <p:extLst>
       <p:ext uri="{BB962C8B-B14F-4D97-AF65-F5344CB8AC3E}">
@@ -2757,6 +3261,62 @@
             <a:endParaRPr lang="en-US"/>
           </a:p>
         </p:txBody>
+      </p:sp>
+      <p:sp>
+        <p:nvSpPr>
+          <p:cNvPr id="8" name="Filete de acento">
+            <a:extLst>
+              <a:ext uri="{C183D7F6-B498-43B3-948B-1728B52AA6E4}">
+                <ns0:decorative xmlns:ns0="http://schemas.microsoft.com/office/drawing/2017/decorative" val="1"/>
+              </a:ext>
+            </a:extLst>
+          </p:cNvPr>
+          <p:cNvSpPr/>
+          <p:nvPr/>
+        </p:nvSpPr>
+        <p:spPr>
+          <a:xfrm>
+            <a:off x="504000" y="1368000"/>
+            <a:ext cx="1714200" cy="57600"/>
+          </a:xfrm>
+          <a:prstGeom prst="rect">
+            <a:avLst/>
+          </a:prstGeom>
+          <a:solidFill>
+            <a:schemeClr val="accent1"/>
+          </a:solidFill>
+          <a:ln>
+            <a:noFill/>
+          </a:ln>
+        </p:spPr>
+      </p:sp>
+      <p:sp>
+        <p:nvSpPr>
+          <p:cNvPr id="9" name="Faixa estética do rodapé">
+            <a:extLst>
+              <a:ext uri="{C183D7F6-B498-43B3-948B-1728B52AA6E4}">
+                <ns0:decorative xmlns:ns0="http://schemas.microsoft.com/office/drawing/2017/decorative" val="1"/>
+              </a:ext>
+            </a:extLst>
+          </p:cNvPr>
+          <p:cNvSpPr/>
+          <p:nvPr/>
+        </p:nvSpPr>
+        <p:spPr>
+          <a:xfrm>
+            <a:off x="0" y="6660000"/>
+            <a:ext cx="12193200" cy="198000"/>
+          </a:xfrm>
+          <a:prstGeom prst="rect">
+            <a:avLst/>
+          </a:prstGeom>
+          <a:solidFill>
+            <a:schemeClr val="accent1"/>
+          </a:solidFill>
+          <a:ln>
+            <a:noFill/>
+          </a:ln>
+        </p:spPr>
       </p:sp>
     </p:spTree>
     <p:extLst>

--- a/assets/modelo-acessivel.pptx
+++ b/assets/modelo-acessivel.pptx
@@ -1585,7 +1585,7 @@
 
 <file path=ppt/slideLayouts/slideLayout4.xml><?xml version="1.0" encoding="utf-8"?>
 <p:sldLayout xmlns:a="http://schemas.openxmlformats.org/drawingml/2006/main" xmlns:r="http://schemas.openxmlformats.org/officeDocument/2006/relationships" xmlns:p="http://schemas.openxmlformats.org/presentationml/2006/main" type="twoObj" preserve="1">
-  <p:cSld name="Duas colunas">
+  <p:cSld name="Conteúdo com janela de Libras">
     <p:spTree>
       <p:nvGrpSpPr>
         <p:cNvPr id="1" name=""/>
@@ -1613,7 +1613,7 @@
         <p:spPr>
           <a:xfrm>
             <a:off x="504000" y="504000"/>
-            <a:ext cx="11185200" cy="792000"/>
+            <a:ext cx="7396800" cy="792000"/>
           </a:xfrm>
         </p:spPr>
         <p:txBody>
@@ -1641,7 +1641,7 @@
         <p:spPr>
           <a:xfrm>
             <a:off x="504000" y="1512000"/>
-            <a:ext cx="5502600" cy="4752000"/>
+            <a:ext cx="7396800" cy="4752000"/>
           </a:xfrm>
         </p:spPr>
         <p:txBody>
@@ -1725,8 +1725,8 @@
         </p:nvSpPr>
         <p:spPr>
           <a:xfrm>
-            <a:off x="6186600" y="1512000"/>
-            <a:ext cx="5502600" cy="4752000"/>
+            <a:off x="4648200" y="1600200"/>
+            <a:ext cx="4038600" cy="4525963"/>
           </a:xfrm>
         </p:spPr>
         <p:txBody>
